--- a/Domingo-21/S02_Domingo-21_2_Post_Falta-1-dia_1x1.pptx
+++ b/Domingo-21/S02_Domingo-21_2_Post_Falta-1-dia_1x1.pptx
@@ -3146,7 +3146,7 @@
                 </a:solidFill>
                 <a:latin typeface="Inter"/>
               </a:rPr>
-              <a:t>MAÑANA LLEGA NOTALY</a:t>
+              <a:t>MAÑANA, 22 DE JUNIO</a:t>
             </a:r>
           </a:p>
         </p:txBody>
@@ -3199,7 +3199,7 @@
         <p:spPr>
           <a:xfrm>
             <a:off x="777240" y="3264408"/>
-            <a:ext cx="6675120" cy="1562608"/>
+            <a:ext cx="6675120" cy="2197608"/>
           </a:xfrm>
           <a:prstGeom prst="rect">
             <a:avLst/>
@@ -3224,7 +3224,7 @@
                 </a:solidFill>
                 <a:latin typeface="Inter"/>
               </a:rPr>
-              <a:t>día para el reveal.</a:t>
+              <a:t>día para el lanzamiento oficial.</a:t>
             </a:r>
           </a:p>
         </p:txBody>
@@ -3237,7 +3237,7 @@
         </p:nvSpPr>
         <p:spPr>
           <a:xfrm>
-            <a:off x="777240" y="4827016"/>
+            <a:off x="777240" y="5462016"/>
             <a:ext cx="6675120" cy="835660"/>
           </a:xfrm>
           <a:prstGeom prst="rect">
@@ -3253,7 +3253,7 @@
           <a:p>
             <a:pPr algn="l">
               <a:lnSpc>
-                <a:spcPct val="110000"/>
+                <a:spcPct val="115000"/>
               </a:lnSpc>
             </a:pPr>
             <a:r>
@@ -3263,7 +3263,7 @@
                 </a:solidFill>
                 <a:latin typeface="Inter"/>
               </a:rPr>
-              <a:t>22 de junio.</a:t>
+              <a:t>Ya puedes entrar: notaly.com.ve</a:t>
             </a:r>
           </a:p>
         </p:txBody>

--- a/Domingo-21/S02_Domingo-21_2_Post_Falta-1-dia_1x1.pptx
+++ b/Domingo-21/S02_Domingo-21_2_Post_Falta-1-dia_1x1.pptx
@@ -3263,7 +3263,7 @@
                 </a:solidFill>
                 <a:latin typeface="Inter"/>
               </a:rPr>
-              <a:t>Ya puedes entrar: notaly.com.ve</a:t>
+              <a:t>notaly.com.ve</a:t>
             </a:r>
           </a:p>
         </p:txBody>
